--- a/deep_learning/1_ANN/4-optimizers-explained/optimizer.pptx
+++ b/deep_learning/1_ANN/4-optimizers-explained/optimizer.pptx
@@ -13,8 +13,8 @@
   <p:sldIdLst>
     <p:sldId id="256" r:id="rId2"/>
     <p:sldId id="297" r:id="rId3"/>
-    <p:sldId id="289" r:id="rId4"/>
-    <p:sldId id="298" r:id="rId5"/>
+    <p:sldId id="298" r:id="rId4"/>
+    <p:sldId id="289" r:id="rId5"/>
     <p:sldId id="290" r:id="rId6"/>
     <p:sldId id="294" r:id="rId7"/>
     <p:sldId id="291" r:id="rId8"/>
@@ -227,7 +227,7 @@
           <a:p>
             <a:fld id="{7BAEECA8-D063-486F-AE31-5020270C1449}" type="datetimeFigureOut">
               <a:rPr lang="en-US" smtClean="0"/>
-              <a:t>4/1/2026</a:t>
+              <a:t>4/5/2026</a:t>
             </a:fld>
             <a:endParaRPr lang="en-US"/>
           </a:p>
@@ -404,7 +404,7 @@
           <a:p>
             <a:fld id="{CB233BD1-3BA8-448D-9D08-7846095EA517}" type="datetimeFigureOut">
               <a:rPr lang="en-US" smtClean="0"/>
-              <a:t>4/1/2026</a:t>
+              <a:t>4/5/2026</a:t>
             </a:fld>
             <a:endParaRPr lang="en-US"/>
           </a:p>
@@ -902,7 +902,7 @@
           <a:p>
             <a:fld id="{6383FAE1-13DE-4511-8C1B-C8AFB720664C}" type="datetimeFigureOut">
               <a:rPr lang="en-US" smtClean="0"/>
-              <a:t>4/1/2026</a:t>
+              <a:t>4/5/2026</a:t>
             </a:fld>
             <a:endParaRPr lang="en-US"/>
           </a:p>
@@ -1100,7 +1100,7 @@
           <a:p>
             <a:fld id="{6383FAE1-13DE-4511-8C1B-C8AFB720664C}" type="datetimeFigureOut">
               <a:rPr lang="en-US" smtClean="0"/>
-              <a:t>4/1/2026</a:t>
+              <a:t>4/5/2026</a:t>
             </a:fld>
             <a:endParaRPr lang="en-US"/>
           </a:p>
@@ -1308,7 +1308,7 @@
           <a:p>
             <a:fld id="{6383FAE1-13DE-4511-8C1B-C8AFB720664C}" type="datetimeFigureOut">
               <a:rPr lang="en-US" smtClean="0"/>
-              <a:t>4/1/2026</a:t>
+              <a:t>4/5/2026</a:t>
             </a:fld>
             <a:endParaRPr lang="en-US"/>
           </a:p>
@@ -1506,7 +1506,7 @@
           <a:p>
             <a:fld id="{6383FAE1-13DE-4511-8C1B-C8AFB720664C}" type="datetimeFigureOut">
               <a:rPr lang="en-US" smtClean="0"/>
-              <a:t>4/1/2026</a:t>
+              <a:t>4/5/2026</a:t>
             </a:fld>
             <a:endParaRPr lang="en-US"/>
           </a:p>
@@ -1781,7 +1781,7 @@
           <a:p>
             <a:fld id="{6383FAE1-13DE-4511-8C1B-C8AFB720664C}" type="datetimeFigureOut">
               <a:rPr lang="en-US" smtClean="0"/>
-              <a:t>4/1/2026</a:t>
+              <a:t>4/5/2026</a:t>
             </a:fld>
             <a:endParaRPr lang="en-US"/>
           </a:p>
@@ -2046,7 +2046,7 @@
           <a:p>
             <a:fld id="{6383FAE1-13DE-4511-8C1B-C8AFB720664C}" type="datetimeFigureOut">
               <a:rPr lang="en-US" smtClean="0"/>
-              <a:t>4/1/2026</a:t>
+              <a:t>4/5/2026</a:t>
             </a:fld>
             <a:endParaRPr lang="en-US"/>
           </a:p>
@@ -2458,7 +2458,7 @@
           <a:p>
             <a:fld id="{6383FAE1-13DE-4511-8C1B-C8AFB720664C}" type="datetimeFigureOut">
               <a:rPr lang="en-US" smtClean="0"/>
-              <a:t>4/1/2026</a:t>
+              <a:t>4/5/2026</a:t>
             </a:fld>
             <a:endParaRPr lang="en-US"/>
           </a:p>
@@ -2599,7 +2599,7 @@
           <a:p>
             <a:fld id="{6383FAE1-13DE-4511-8C1B-C8AFB720664C}" type="datetimeFigureOut">
               <a:rPr lang="en-US" smtClean="0"/>
-              <a:t>4/1/2026</a:t>
+              <a:t>4/5/2026</a:t>
             </a:fld>
             <a:endParaRPr lang="en-US"/>
           </a:p>
@@ -2712,7 +2712,7 @@
           <a:p>
             <a:fld id="{6383FAE1-13DE-4511-8C1B-C8AFB720664C}" type="datetimeFigureOut">
               <a:rPr lang="en-US" smtClean="0"/>
-              <a:t>4/1/2026</a:t>
+              <a:t>4/5/2026</a:t>
             </a:fld>
             <a:endParaRPr lang="en-US"/>
           </a:p>
@@ -3023,7 +3023,7 @@
           <a:p>
             <a:fld id="{6383FAE1-13DE-4511-8C1B-C8AFB720664C}" type="datetimeFigureOut">
               <a:rPr lang="en-US" smtClean="0"/>
-              <a:t>4/1/2026</a:t>
+              <a:t>4/5/2026</a:t>
             </a:fld>
             <a:endParaRPr lang="en-US"/>
           </a:p>
@@ -3314,7 +3314,7 @@
           <a:p>
             <a:fld id="{6383FAE1-13DE-4511-8C1B-C8AFB720664C}" type="datetimeFigureOut">
               <a:rPr lang="en-US" smtClean="0"/>
-              <a:t>4/1/2026</a:t>
+              <a:t>4/5/2026</a:t>
             </a:fld>
             <a:endParaRPr lang="en-US"/>
           </a:p>
@@ -3558,7 +3558,7 @@
           <a:p>
             <a:fld id="{6383FAE1-13DE-4511-8C1B-C8AFB720664C}" type="datetimeFigureOut">
               <a:rPr lang="en-US" smtClean="0"/>
-              <a:t>4/1/2026</a:t>
+              <a:t>4/5/2026</a:t>
             </a:fld>
             <a:endParaRPr lang="en-US"/>
           </a:p>
@@ -5593,393 +5593,6 @@
   <p:cSld>
     <p:spTree>
       <p:nvGrpSpPr>
-        <p:cNvPr id="1" name=""/>
-        <p:cNvGrpSpPr/>
-        <p:nvPr/>
-      </p:nvGrpSpPr>
-      <p:grpSpPr>
-        <a:xfrm>
-          <a:off x="0" y="0"/>
-          <a:ext cx="0" cy="0"/>
-          <a:chOff x="0" y="0"/>
-          <a:chExt cx="0" cy="0"/>
-        </a:xfrm>
-      </p:grpSpPr>
-      <p:sp>
-        <p:nvSpPr>
-          <p:cNvPr id="5" name="TextBox 4">
-            <a:extLst>
-              <a:ext uri="{FF2B5EF4-FFF2-40B4-BE49-F238E27FC236}">
-                <a16:creationId xmlns:a16="http://schemas.microsoft.com/office/drawing/2014/main" id="{2F57E85B-C4A0-8FA6-2444-37D8BAD9BC72}"/>
-              </a:ext>
-            </a:extLst>
-          </p:cNvPr>
-          <p:cNvSpPr txBox="1"/>
-          <p:nvPr/>
-        </p:nvSpPr>
-        <p:spPr>
-          <a:xfrm>
-            <a:off x="64008" y="536424"/>
-            <a:ext cx="12015216" cy="5632311"/>
-          </a:xfrm>
-          <a:prstGeom prst="rect">
-            <a:avLst/>
-          </a:prstGeom>
-          <a:noFill/>
-        </p:spPr>
-        <p:txBody>
-          <a:bodyPr wrap="square">
-            <a:spAutoFit/>
-          </a:bodyPr>
-          <a:lstStyle/>
-          <a:p>
-            <a:pPr>
-              <a:buNone/>
-            </a:pPr>
-            <a:r>
-              <a:rPr lang="en-US" sz="2400" dirty="0">
-                <a:solidFill>
-                  <a:schemeClr val="accent6">
-                    <a:lumMod val="60000"/>
-                    <a:lumOff val="40000"/>
-                  </a:schemeClr>
-                </a:solidFill>
-              </a:rPr>
-              <a:t>Most optimizers are variations of </a:t>
-            </a:r>
-            <a:r>
-              <a:rPr lang="en-US" sz="2400" b="1" dirty="0">
-                <a:solidFill>
-                  <a:schemeClr val="accent6">
-                    <a:lumMod val="60000"/>
-                    <a:lumOff val="40000"/>
-                  </a:schemeClr>
-                </a:solidFill>
-              </a:rPr>
-              <a:t>Gradient Descent</a:t>
-            </a:r>
-            <a:r>
-              <a:rPr lang="en-US" sz="2400" dirty="0">
-                <a:solidFill>
-                  <a:schemeClr val="accent6">
-                    <a:lumMod val="60000"/>
-                    <a:lumOff val="40000"/>
-                  </a:schemeClr>
-                </a:solidFill>
-              </a:rPr>
-              <a:t>. </a:t>
-            </a:r>
-          </a:p>
-          <a:p>
-            <a:pPr>
-              <a:buNone/>
-            </a:pPr>
-            <a:endParaRPr lang="en-US" sz="2400" dirty="0">
-              <a:solidFill>
-                <a:schemeClr val="accent6">
-                  <a:lumMod val="60000"/>
-                  <a:lumOff val="40000"/>
-                </a:schemeClr>
-              </a:solidFill>
-            </a:endParaRPr>
-          </a:p>
-          <a:p>
-            <a:pPr>
-              <a:buNone/>
-            </a:pPr>
-            <a:r>
-              <a:rPr lang="en-US" sz="2400" dirty="0">
-                <a:solidFill>
-                  <a:schemeClr val="accent6">
-                    <a:lumMod val="60000"/>
-                    <a:lumOff val="40000"/>
-                  </a:schemeClr>
-                </a:solidFill>
-              </a:rPr>
-              <a:t>They</a:t>
-            </a:r>
-          </a:p>
-          <a:p>
-            <a:pPr marL="342900" indent="-342900">
-              <a:buFont typeface="+mj-lt"/>
-              <a:buAutoNum type="arabicPeriod"/>
-            </a:pPr>
-            <a:r>
-              <a:rPr lang="en-US" sz="2400" dirty="0">
-                <a:solidFill>
-                  <a:schemeClr val="accent6">
-                    <a:lumMod val="60000"/>
-                    <a:lumOff val="40000"/>
-                  </a:schemeClr>
-                </a:solidFill>
-              </a:rPr>
-              <a:t>Compute the </a:t>
-            </a:r>
-            <a:r>
-              <a:rPr lang="en-US" sz="2400" b="1" dirty="0">
-                <a:solidFill>
-                  <a:schemeClr val="accent6">
-                    <a:lumMod val="60000"/>
-                    <a:lumOff val="40000"/>
-                  </a:schemeClr>
-                </a:solidFill>
-              </a:rPr>
-              <a:t>gradient</a:t>
-            </a:r>
-            <a:r>
-              <a:rPr lang="en-US" sz="2400" dirty="0">
-                <a:solidFill>
-                  <a:schemeClr val="accent6">
-                    <a:lumMod val="60000"/>
-                    <a:lumOff val="40000"/>
-                  </a:schemeClr>
-                </a:solidFill>
-              </a:rPr>
-              <a:t> (slope of loss function with respect to weights).</a:t>
-            </a:r>
-          </a:p>
-          <a:p>
-            <a:pPr marL="342900" indent="-342900">
-              <a:buFont typeface="+mj-lt"/>
-              <a:buAutoNum type="arabicPeriod"/>
-            </a:pPr>
-            <a:r>
-              <a:rPr lang="en-US" sz="2400" dirty="0">
-                <a:solidFill>
-                  <a:schemeClr val="accent6">
-                    <a:lumMod val="60000"/>
-                    <a:lumOff val="40000"/>
-                  </a:schemeClr>
-                </a:solidFill>
-              </a:rPr>
-              <a:t>Update weights in the opposite direction of the gradient (because we want to minimize loss).</a:t>
-            </a:r>
-          </a:p>
-          <a:p>
-            <a:pPr>
-              <a:buNone/>
-            </a:pPr>
-            <a:endParaRPr lang="en-US" sz="2400" dirty="0">
-              <a:solidFill>
-                <a:schemeClr val="accent6">
-                  <a:lumMod val="60000"/>
-                  <a:lumOff val="40000"/>
-                </a:schemeClr>
-              </a:solidFill>
-            </a:endParaRPr>
-          </a:p>
-          <a:p>
-            <a:r>
-              <a:rPr lang="en-US" sz="2400" dirty="0">
-                <a:solidFill>
-                  <a:schemeClr val="accent6">
-                    <a:lumMod val="60000"/>
-                    <a:lumOff val="40000"/>
-                  </a:schemeClr>
-                </a:solidFill>
-              </a:rPr>
-              <a:t>Formula:</a:t>
-            </a:r>
-          </a:p>
-          <a:p>
-            <a:endParaRPr lang="en-US" sz="2400" dirty="0">
-              <a:solidFill>
-                <a:schemeClr val="accent6">
-                  <a:lumMod val="60000"/>
-                  <a:lumOff val="40000"/>
-                </a:schemeClr>
-              </a:solidFill>
-            </a:endParaRPr>
-          </a:p>
-          <a:p>
-            <a:endParaRPr lang="en-US" sz="2400" dirty="0">
-              <a:solidFill>
-                <a:schemeClr val="accent6">
-                  <a:lumMod val="60000"/>
-                  <a:lumOff val="40000"/>
-                </a:schemeClr>
-              </a:solidFill>
-            </a:endParaRPr>
-          </a:p>
-          <a:p>
-            <a:endParaRPr lang="en-US" sz="2400" dirty="0">
-              <a:solidFill>
-                <a:schemeClr val="accent6">
-                  <a:lumMod val="60000"/>
-                  <a:lumOff val="40000"/>
-                </a:schemeClr>
-              </a:solidFill>
-            </a:endParaRPr>
-          </a:p>
-          <a:p>
-            <a:endParaRPr lang="en-US" sz="2400" dirty="0">
-              <a:solidFill>
-                <a:schemeClr val="accent6">
-                  <a:lumMod val="60000"/>
-                  <a:lumOff val="40000"/>
-                </a:schemeClr>
-              </a:solidFill>
-            </a:endParaRPr>
-          </a:p>
-          <a:p>
-            <a:endParaRPr lang="en-US" sz="2400" dirty="0">
-              <a:solidFill>
-                <a:schemeClr val="accent6">
-                  <a:lumMod val="60000"/>
-                  <a:lumOff val="40000"/>
-                </a:schemeClr>
-              </a:solidFill>
-            </a:endParaRPr>
-          </a:p>
-          <a:p>
-            <a:r>
-              <a:rPr lang="en-US" sz="2400" dirty="0">
-                <a:solidFill>
-                  <a:schemeClr val="accent6">
-                    <a:lumMod val="60000"/>
-                    <a:lumOff val="40000"/>
-                  </a:schemeClr>
-                </a:solidFill>
-              </a:rPr>
-              <a:t>Where:</a:t>
-            </a:r>
-          </a:p>
-          <a:p>
-            <a:r>
-              <a:rPr lang="en-US" sz="2400" b="1" i="1" dirty="0">
-                <a:solidFill>
-                  <a:schemeClr val="accent6">
-                    <a:lumMod val="60000"/>
-                    <a:lumOff val="40000"/>
-                  </a:schemeClr>
-                </a:solidFill>
-              </a:rPr>
-              <a:t>w, b </a:t>
-            </a:r>
-            <a:r>
-              <a:rPr lang="en-US" sz="2400" dirty="0">
-                <a:solidFill>
-                  <a:schemeClr val="accent6">
-                    <a:lumMod val="60000"/>
-                    <a:lumOff val="40000"/>
-                  </a:schemeClr>
-                </a:solidFill>
-              </a:rPr>
-              <a:t>is the weight, bias</a:t>
-            </a:r>
-            <a:endParaRPr lang="en-US" sz="2400" b="1" i="1" dirty="0">
-              <a:solidFill>
-                <a:schemeClr val="accent6">
-                  <a:lumMod val="60000"/>
-                  <a:lumOff val="40000"/>
-                </a:schemeClr>
-              </a:solidFill>
-            </a:endParaRPr>
-          </a:p>
-          <a:p>
-            <a:r>
-              <a:rPr lang="en-US" sz="2400" b="1" dirty="0">
-                <a:solidFill>
-                  <a:schemeClr val="accent6">
-                    <a:lumMod val="60000"/>
-                    <a:lumOff val="40000"/>
-                  </a:schemeClr>
-                </a:solidFill>
-              </a:rPr>
-              <a:t>η (eta)</a:t>
-            </a:r>
-            <a:r>
-              <a:rPr lang="en-US" sz="2400" dirty="0">
-                <a:solidFill>
-                  <a:schemeClr val="accent6">
-                    <a:lumMod val="60000"/>
-                    <a:lumOff val="40000"/>
-                  </a:schemeClr>
-                </a:solidFill>
-              </a:rPr>
-              <a:t> = learning rate</a:t>
-            </a:r>
-          </a:p>
-        </p:txBody>
-      </p:sp>
-      <p:pic>
-        <p:nvPicPr>
-          <p:cNvPr id="3" name="Picture 2">
-            <a:extLst>
-              <a:ext uri="{FF2B5EF4-FFF2-40B4-BE49-F238E27FC236}">
-                <a16:creationId xmlns:a16="http://schemas.microsoft.com/office/drawing/2014/main" id="{722BE019-0D28-535C-871A-A1E8A90D1B7D}"/>
-              </a:ext>
-            </a:extLst>
-          </p:cNvPr>
-          <p:cNvPicPr>
-            <a:picLocks noChangeAspect="1"/>
-          </p:cNvPicPr>
-          <p:nvPr/>
-        </p:nvPicPr>
-        <p:blipFill>
-          <a:blip r:embed="rId2"/>
-          <a:stretch>
-            <a:fillRect/>
-          </a:stretch>
-        </p:blipFill>
-        <p:spPr>
-          <a:xfrm>
-            <a:off x="2799890" y="3089636"/>
-            <a:ext cx="3296110" cy="1933845"/>
-          </a:xfrm>
-          <a:prstGeom prst="rect">
-            <a:avLst/>
-          </a:prstGeom>
-        </p:spPr>
-      </p:pic>
-      <p:pic>
-        <p:nvPicPr>
-          <p:cNvPr id="6" name="Picture 5">
-            <a:extLst>
-              <a:ext uri="{FF2B5EF4-FFF2-40B4-BE49-F238E27FC236}">
-                <a16:creationId xmlns:a16="http://schemas.microsoft.com/office/drawing/2014/main" id="{7CF8B257-2CE5-BD18-DDBB-9AB0BCCF64CA}"/>
-              </a:ext>
-            </a:extLst>
-          </p:cNvPr>
-          <p:cNvPicPr>
-            <a:picLocks noChangeAspect="1"/>
-          </p:cNvPicPr>
-          <p:nvPr/>
-        </p:nvPicPr>
-        <p:blipFill>
-          <a:blip r:embed="rId3"/>
-          <a:stretch>
-            <a:fillRect/>
-          </a:stretch>
-        </p:blipFill>
-        <p:spPr>
-          <a:xfrm>
-            <a:off x="6940580" y="3174033"/>
-            <a:ext cx="4903059" cy="1443846"/>
-          </a:xfrm>
-          <a:prstGeom prst="rect">
-            <a:avLst/>
-          </a:prstGeom>
-        </p:spPr>
-      </p:pic>
-    </p:spTree>
-    <p:extLst>
-      <p:ext uri="{BB962C8B-B14F-4D97-AF65-F5344CB8AC3E}">
-        <p14:creationId xmlns:p14="http://schemas.microsoft.com/office/powerpoint/2010/main" val="4191084248"/>
-      </p:ext>
-    </p:extLst>
-  </p:cSld>
-  <p:clrMapOvr>
-    <a:masterClrMapping/>
-  </p:clrMapOvr>
-</p:sld>
-</file>
-
-<file path=ppt/slides/slide4.xml><?xml version="1.0" encoding="utf-8"?>
-<p:sld xmlns:a="http://schemas.openxmlformats.org/drawingml/2006/main" xmlns:r="http://schemas.openxmlformats.org/officeDocument/2006/relationships" xmlns:p="http://schemas.openxmlformats.org/presentationml/2006/main">
-  <p:cSld>
-    <p:spTree>
-      <p:nvGrpSpPr>
         <p:cNvPr id="1" name="">
           <a:extLst>
             <a:ext uri="{FF2B5EF4-FFF2-40B4-BE49-F238E27FC236}">
@@ -6000,10 +5613,10 @@
       </p:grpSpPr>
       <p:pic>
         <p:nvPicPr>
-          <p:cNvPr id="6" name="Picture 5">
-            <a:extLst>
-              <a:ext uri="{FF2B5EF4-FFF2-40B4-BE49-F238E27FC236}">
-                <a16:creationId xmlns:a16="http://schemas.microsoft.com/office/drawing/2014/main" id="{AAABC815-5741-E244-AFDB-9DA6296C16E7}"/>
+          <p:cNvPr id="4" name="Picture 3">
+            <a:extLst>
+              <a:ext uri="{FF2B5EF4-FFF2-40B4-BE49-F238E27FC236}">
+                <a16:creationId xmlns:a16="http://schemas.microsoft.com/office/drawing/2014/main" id="{F48553B6-FFDE-F8ED-8091-0044D40065F8}"/>
               </a:ext>
             </a:extLst>
           </p:cNvPr>
@@ -6020,20 +5633,96 @@
         </p:blipFill>
         <p:spPr>
           <a:xfrm>
-            <a:off x="6940580" y="3174033"/>
-            <a:ext cx="4903059" cy="1443846"/>
+            <a:off x="512065" y="1292679"/>
+            <a:ext cx="6250604" cy="3892845"/>
           </a:xfrm>
           <a:prstGeom prst="rect">
             <a:avLst/>
           </a:prstGeom>
         </p:spPr>
       </p:pic>
+      <p:sp>
+        <p:nvSpPr>
+          <p:cNvPr id="8" name="TextBox 7">
+            <a:extLst>
+              <a:ext uri="{FF2B5EF4-FFF2-40B4-BE49-F238E27FC236}">
+                <a16:creationId xmlns:a16="http://schemas.microsoft.com/office/drawing/2014/main" id="{9DE35616-FDCF-9876-8E14-6F8705E88DC6}"/>
+              </a:ext>
+            </a:extLst>
+          </p:cNvPr>
+          <p:cNvSpPr txBox="1"/>
+          <p:nvPr/>
+        </p:nvSpPr>
+        <p:spPr>
+          <a:xfrm>
+            <a:off x="512064" y="263390"/>
+            <a:ext cx="9253728" cy="461665"/>
+          </a:xfrm>
+          <a:prstGeom prst="rect">
+            <a:avLst/>
+          </a:prstGeom>
+          <a:noFill/>
+        </p:spPr>
+        <p:txBody>
+          <a:bodyPr wrap="square">
+            <a:spAutoFit/>
+          </a:bodyPr>
+          <a:lstStyle/>
+          <a:p>
+            <a:r>
+              <a:rPr lang="en-US" sz="2400" dirty="0">
+                <a:solidFill>
+                  <a:schemeClr val="accent6">
+                    <a:lumMod val="60000"/>
+                    <a:lumOff val="40000"/>
+                  </a:schemeClr>
+                </a:solidFill>
+              </a:rPr>
+              <a:t>Goal is to find </a:t>
+            </a:r>
+            <a:r>
+              <a:rPr lang="en-US" sz="2400" b="1" dirty="0">
+                <a:solidFill>
+                  <a:schemeClr val="accent6">
+                    <a:lumMod val="60000"/>
+                    <a:lumOff val="40000"/>
+                  </a:schemeClr>
+                </a:solidFill>
+              </a:rPr>
+              <a:t>weights and bias</a:t>
+            </a:r>
+            <a:r>
+              <a:rPr lang="en-US" sz="2400" dirty="0">
+                <a:solidFill>
+                  <a:schemeClr val="accent6">
+                    <a:lumMod val="60000"/>
+                    <a:lumOff val="40000"/>
+                  </a:schemeClr>
+                </a:solidFill>
+              </a:rPr>
+              <a:t> such that the </a:t>
+            </a:r>
+            <a:r>
+              <a:rPr lang="en-US" sz="2400" b="1" dirty="0">
+                <a:solidFill>
+                  <a:schemeClr val="accent6">
+                    <a:lumMod val="60000"/>
+                    <a:lumOff val="40000"/>
+                  </a:schemeClr>
+                </a:solidFill>
+              </a:rPr>
+              <a:t>Loss is minimum</a:t>
+            </a:r>
+            <a:endParaRPr lang="en-US" sz="2400" b="1" dirty="0"/>
+          </a:p>
+        </p:txBody>
+      </p:sp>
       <p:pic>
         <p:nvPicPr>
-          <p:cNvPr id="4" name="Picture 3">
-            <a:extLst>
-              <a:ext uri="{FF2B5EF4-FFF2-40B4-BE49-F238E27FC236}">
-                <a16:creationId xmlns:a16="http://schemas.microsoft.com/office/drawing/2014/main" id="{F48553B6-FFDE-F8ED-8091-0044D40065F8}"/>
+          <p:cNvPr id="2" name="Picture 1">
+            <a:extLst>
+              <a:ext uri="{FF2B5EF4-FFF2-40B4-BE49-F238E27FC236}">
+                <a16:creationId xmlns:a16="http://schemas.microsoft.com/office/drawing/2014/main" id="{5A37DEF0-4DE6-D7CD-9A8E-DB2D2120DE47}"/>
               </a:ext>
             </a:extLst>
           </p:cNvPr>
@@ -6050,20 +5739,50 @@
         </p:blipFill>
         <p:spPr>
           <a:xfrm>
-            <a:off x="609421" y="1353312"/>
-            <a:ext cx="6153247" cy="3832212"/>
+            <a:off x="6526354" y="2462077"/>
+            <a:ext cx="4903059" cy="1443846"/>
           </a:xfrm>
           <a:prstGeom prst="rect">
             <a:avLst/>
           </a:prstGeom>
         </p:spPr>
       </p:pic>
-      <p:sp>
-        <p:nvSpPr>
-          <p:cNvPr id="8" name="TextBox 7">
-            <a:extLst>
-              <a:ext uri="{FF2B5EF4-FFF2-40B4-BE49-F238E27FC236}">
-                <a16:creationId xmlns:a16="http://schemas.microsoft.com/office/drawing/2014/main" id="{9DE35616-FDCF-9876-8E14-6F8705E88DC6}"/>
+    </p:spTree>
+    <p:extLst>
+      <p:ext uri="{BB962C8B-B14F-4D97-AF65-F5344CB8AC3E}">
+        <p14:creationId xmlns:p14="http://schemas.microsoft.com/office/powerpoint/2010/main" val="1689982182"/>
+      </p:ext>
+    </p:extLst>
+  </p:cSld>
+  <p:clrMapOvr>
+    <a:masterClrMapping/>
+  </p:clrMapOvr>
+</p:sld>
+</file>
+
+<file path=ppt/slides/slide4.xml><?xml version="1.0" encoding="utf-8"?>
+<p:sld xmlns:a="http://schemas.openxmlformats.org/drawingml/2006/main" xmlns:r="http://schemas.openxmlformats.org/officeDocument/2006/relationships" xmlns:p="http://schemas.openxmlformats.org/presentationml/2006/main">
+  <p:cSld>
+    <p:spTree>
+      <p:nvGrpSpPr>
+        <p:cNvPr id="1" name=""/>
+        <p:cNvGrpSpPr/>
+        <p:nvPr/>
+      </p:nvGrpSpPr>
+      <p:grpSpPr>
+        <a:xfrm>
+          <a:off x="0" y="0"/>
+          <a:ext cx="0" cy="0"/>
+          <a:chOff x="0" y="0"/>
+          <a:chExt cx="0" cy="0"/>
+        </a:xfrm>
+      </p:grpSpPr>
+      <p:sp>
+        <p:nvSpPr>
+          <p:cNvPr id="5" name="TextBox 4">
+            <a:extLst>
+              <a:ext uri="{FF2B5EF4-FFF2-40B4-BE49-F238E27FC236}">
+                <a16:creationId xmlns:a16="http://schemas.microsoft.com/office/drawing/2014/main" id="{2F57E85B-C4A0-8FA6-2444-37D8BAD9BC72}"/>
               </a:ext>
             </a:extLst>
           </p:cNvPr>
@@ -6072,8 +5791,8 @@
         </p:nvSpPr>
         <p:spPr>
           <a:xfrm>
-            <a:off x="1161288" y="263390"/>
-            <a:ext cx="9253728" cy="461665"/>
+            <a:off x="64008" y="161520"/>
+            <a:ext cx="12015216" cy="5632311"/>
           </a:xfrm>
           <a:prstGeom prst="rect">
             <a:avLst/>
@@ -6086,6 +5805,9 @@
           </a:bodyPr>
           <a:lstStyle/>
           <a:p>
+            <a:pPr>
+              <a:buNone/>
+            </a:pPr>
             <a:r>
               <a:rPr lang="en-US" sz="2400" dirty="0">
                 <a:solidFill>
@@ -6095,16 +5817,357 @@
                   </a:schemeClr>
                 </a:solidFill>
               </a:rPr>
-              <a:t>We are trying to find weights and bias such that the Loss is minimum</a:t>
-            </a:r>
-            <a:endParaRPr lang="en-US" sz="2400" dirty="0"/>
-          </a:p>
-        </p:txBody>
-      </p:sp>
+              <a:t>Most optimizers are variations of </a:t>
+            </a:r>
+            <a:r>
+              <a:rPr lang="en-US" sz="2400" b="1" dirty="0">
+                <a:solidFill>
+                  <a:schemeClr val="accent6">
+                    <a:lumMod val="60000"/>
+                    <a:lumOff val="40000"/>
+                  </a:schemeClr>
+                </a:solidFill>
+              </a:rPr>
+              <a:t>Gradient Descent</a:t>
+            </a:r>
+            <a:r>
+              <a:rPr lang="en-US" sz="2400" dirty="0">
+                <a:solidFill>
+                  <a:schemeClr val="accent6">
+                    <a:lumMod val="60000"/>
+                    <a:lumOff val="40000"/>
+                  </a:schemeClr>
+                </a:solidFill>
+              </a:rPr>
+              <a:t>. </a:t>
+            </a:r>
+          </a:p>
+          <a:p>
+            <a:pPr>
+              <a:buNone/>
+            </a:pPr>
+            <a:endParaRPr lang="en-US" sz="2400" dirty="0">
+              <a:solidFill>
+                <a:schemeClr val="accent6">
+                  <a:lumMod val="60000"/>
+                  <a:lumOff val="40000"/>
+                </a:schemeClr>
+              </a:solidFill>
+            </a:endParaRPr>
+          </a:p>
+          <a:p>
+            <a:pPr>
+              <a:buNone/>
+            </a:pPr>
+            <a:r>
+              <a:rPr lang="en-US" sz="2400" dirty="0">
+                <a:solidFill>
+                  <a:schemeClr val="accent6">
+                    <a:lumMod val="60000"/>
+                    <a:lumOff val="40000"/>
+                  </a:schemeClr>
+                </a:solidFill>
+              </a:rPr>
+              <a:t>They</a:t>
+            </a:r>
+          </a:p>
+          <a:p>
+            <a:pPr marL="342900" indent="-342900">
+              <a:buFont typeface="+mj-lt"/>
+              <a:buAutoNum type="arabicPeriod"/>
+            </a:pPr>
+            <a:r>
+              <a:rPr lang="en-US" sz="2400" dirty="0">
+                <a:solidFill>
+                  <a:schemeClr val="accent6">
+                    <a:lumMod val="60000"/>
+                    <a:lumOff val="40000"/>
+                  </a:schemeClr>
+                </a:solidFill>
+              </a:rPr>
+              <a:t>Compute the </a:t>
+            </a:r>
+            <a:r>
+              <a:rPr lang="en-US" sz="2400" b="1" dirty="0">
+                <a:solidFill>
+                  <a:schemeClr val="accent6">
+                    <a:lumMod val="60000"/>
+                    <a:lumOff val="40000"/>
+                  </a:schemeClr>
+                </a:solidFill>
+              </a:rPr>
+              <a:t>gradient</a:t>
+            </a:r>
+            <a:r>
+              <a:rPr lang="en-US" sz="2400" dirty="0">
+                <a:solidFill>
+                  <a:schemeClr val="accent6">
+                    <a:lumMod val="60000"/>
+                    <a:lumOff val="40000"/>
+                  </a:schemeClr>
+                </a:solidFill>
+              </a:rPr>
+              <a:t> (slope of loss function with respect to weights).</a:t>
+            </a:r>
+          </a:p>
+          <a:p>
+            <a:pPr marL="342900" indent="-342900">
+              <a:buFont typeface="+mj-lt"/>
+              <a:buAutoNum type="arabicPeriod"/>
+            </a:pPr>
+            <a:r>
+              <a:rPr lang="en-US" sz="2400" dirty="0">
+                <a:solidFill>
+                  <a:schemeClr val="accent6">
+                    <a:lumMod val="60000"/>
+                    <a:lumOff val="40000"/>
+                  </a:schemeClr>
+                </a:solidFill>
+              </a:rPr>
+              <a:t>Update weights in the opposite direction of the gradient (because we want to minimize loss).</a:t>
+            </a:r>
+          </a:p>
+          <a:p>
+            <a:pPr>
+              <a:buNone/>
+            </a:pPr>
+            <a:endParaRPr lang="en-US" sz="2400" dirty="0">
+              <a:solidFill>
+                <a:schemeClr val="accent6">
+                  <a:lumMod val="60000"/>
+                  <a:lumOff val="40000"/>
+                </a:schemeClr>
+              </a:solidFill>
+            </a:endParaRPr>
+          </a:p>
+          <a:p>
+            <a:r>
+              <a:rPr lang="en-US" sz="2400" dirty="0">
+                <a:solidFill>
+                  <a:schemeClr val="accent6">
+                    <a:lumMod val="60000"/>
+                    <a:lumOff val="40000"/>
+                  </a:schemeClr>
+                </a:solidFill>
+              </a:rPr>
+              <a:t>Formula:</a:t>
+            </a:r>
+          </a:p>
+          <a:p>
+            <a:endParaRPr lang="en-US" sz="2400" dirty="0">
+              <a:solidFill>
+                <a:schemeClr val="accent6">
+                  <a:lumMod val="60000"/>
+                  <a:lumOff val="40000"/>
+                </a:schemeClr>
+              </a:solidFill>
+            </a:endParaRPr>
+          </a:p>
+          <a:p>
+            <a:endParaRPr lang="en-US" sz="2400" dirty="0">
+              <a:solidFill>
+                <a:schemeClr val="accent6">
+                  <a:lumMod val="60000"/>
+                  <a:lumOff val="40000"/>
+                </a:schemeClr>
+              </a:solidFill>
+            </a:endParaRPr>
+          </a:p>
+          <a:p>
+            <a:endParaRPr lang="en-US" sz="2400" dirty="0">
+              <a:solidFill>
+                <a:schemeClr val="accent6">
+                  <a:lumMod val="60000"/>
+                  <a:lumOff val="40000"/>
+                </a:schemeClr>
+              </a:solidFill>
+            </a:endParaRPr>
+          </a:p>
+          <a:p>
+            <a:endParaRPr lang="en-US" sz="2400" dirty="0">
+              <a:solidFill>
+                <a:schemeClr val="accent6">
+                  <a:lumMod val="60000"/>
+                  <a:lumOff val="40000"/>
+                </a:schemeClr>
+              </a:solidFill>
+            </a:endParaRPr>
+          </a:p>
+          <a:p>
+            <a:endParaRPr lang="en-US" sz="2400" dirty="0">
+              <a:solidFill>
+                <a:schemeClr val="accent6">
+                  <a:lumMod val="60000"/>
+                  <a:lumOff val="40000"/>
+                </a:schemeClr>
+              </a:solidFill>
+            </a:endParaRPr>
+          </a:p>
+          <a:p>
+            <a:r>
+              <a:rPr lang="en-US" sz="2400" dirty="0">
+                <a:solidFill>
+                  <a:schemeClr val="accent6">
+                    <a:lumMod val="60000"/>
+                    <a:lumOff val="40000"/>
+                  </a:schemeClr>
+                </a:solidFill>
+              </a:rPr>
+              <a:t>Where:</a:t>
+            </a:r>
+          </a:p>
+          <a:p>
+            <a:r>
+              <a:rPr lang="en-US" sz="2400" b="1" i="1" dirty="0">
+                <a:solidFill>
+                  <a:schemeClr val="accent6">
+                    <a:lumMod val="60000"/>
+                    <a:lumOff val="40000"/>
+                  </a:schemeClr>
+                </a:solidFill>
+              </a:rPr>
+              <a:t>w, b </a:t>
+            </a:r>
+            <a:r>
+              <a:rPr lang="en-US" sz="2400" dirty="0">
+                <a:solidFill>
+                  <a:schemeClr val="accent6">
+                    <a:lumMod val="60000"/>
+                    <a:lumOff val="40000"/>
+                  </a:schemeClr>
+                </a:solidFill>
+              </a:rPr>
+              <a:t>is the weight, bias</a:t>
+            </a:r>
+            <a:endParaRPr lang="en-US" sz="2400" b="1" i="1" dirty="0">
+              <a:solidFill>
+                <a:schemeClr val="accent6">
+                  <a:lumMod val="60000"/>
+                  <a:lumOff val="40000"/>
+                </a:schemeClr>
+              </a:solidFill>
+            </a:endParaRPr>
+          </a:p>
+          <a:p>
+            <a:r>
+              <a:rPr lang="en-US" sz="2400" b="1" dirty="0">
+                <a:solidFill>
+                  <a:schemeClr val="accent6">
+                    <a:lumMod val="60000"/>
+                    <a:lumOff val="40000"/>
+                  </a:schemeClr>
+                </a:solidFill>
+              </a:rPr>
+              <a:t>η (eta)</a:t>
+            </a:r>
+            <a:r>
+              <a:rPr lang="en-US" sz="2400" dirty="0">
+                <a:solidFill>
+                  <a:schemeClr val="accent6">
+                    <a:lumMod val="60000"/>
+                    <a:lumOff val="40000"/>
+                  </a:schemeClr>
+                </a:solidFill>
+              </a:rPr>
+              <a:t> = learning rate</a:t>
+            </a:r>
+          </a:p>
+        </p:txBody>
+      </p:sp>
+      <p:pic>
+        <p:nvPicPr>
+          <p:cNvPr id="3" name="Picture 2">
+            <a:extLst>
+              <a:ext uri="{FF2B5EF4-FFF2-40B4-BE49-F238E27FC236}">
+                <a16:creationId xmlns:a16="http://schemas.microsoft.com/office/drawing/2014/main" id="{722BE019-0D28-535C-871A-A1E8A90D1B7D}"/>
+              </a:ext>
+            </a:extLst>
+          </p:cNvPr>
+          <p:cNvPicPr>
+            <a:picLocks noChangeAspect="1"/>
+          </p:cNvPicPr>
+          <p:nvPr/>
+        </p:nvPicPr>
+        <p:blipFill>
+          <a:blip r:embed="rId2"/>
+          <a:stretch>
+            <a:fillRect/>
+          </a:stretch>
+        </p:blipFill>
+        <p:spPr>
+          <a:xfrm>
+            <a:off x="2068369" y="2462077"/>
+            <a:ext cx="3296110" cy="1933845"/>
+          </a:xfrm>
+          <a:prstGeom prst="rect">
+            <a:avLst/>
+          </a:prstGeom>
+        </p:spPr>
+      </p:pic>
+      <p:pic>
+        <p:nvPicPr>
+          <p:cNvPr id="6" name="Picture 5">
+            <a:extLst>
+              <a:ext uri="{FF2B5EF4-FFF2-40B4-BE49-F238E27FC236}">
+                <a16:creationId xmlns:a16="http://schemas.microsoft.com/office/drawing/2014/main" id="{7CF8B257-2CE5-BD18-DDBB-9AB0BCCF64CA}"/>
+              </a:ext>
+            </a:extLst>
+          </p:cNvPr>
+          <p:cNvPicPr>
+            <a:picLocks noChangeAspect="1"/>
+          </p:cNvPicPr>
+          <p:nvPr/>
+        </p:nvPicPr>
+        <p:blipFill>
+          <a:blip r:embed="rId3"/>
+          <a:stretch>
+            <a:fillRect/>
+          </a:stretch>
+        </p:blipFill>
+        <p:spPr>
+          <a:xfrm>
+            <a:off x="6526354" y="2462077"/>
+            <a:ext cx="4903059" cy="1443846"/>
+          </a:xfrm>
+          <a:prstGeom prst="rect">
+            <a:avLst/>
+          </a:prstGeom>
+        </p:spPr>
+      </p:pic>
+      <p:pic>
+        <p:nvPicPr>
+          <p:cNvPr id="2" name="Picture 1">
+            <a:extLst>
+              <a:ext uri="{FF2B5EF4-FFF2-40B4-BE49-F238E27FC236}">
+                <a16:creationId xmlns:a16="http://schemas.microsoft.com/office/drawing/2014/main" id="{9438A4F7-F4C7-2405-FD10-C242F4816E11}"/>
+              </a:ext>
+            </a:extLst>
+          </p:cNvPr>
+          <p:cNvPicPr>
+            <a:picLocks noChangeAspect="1"/>
+          </p:cNvPicPr>
+          <p:nvPr/>
+        </p:nvPicPr>
+        <p:blipFill>
+          <a:blip r:embed="rId4"/>
+          <a:stretch>
+            <a:fillRect/>
+          </a:stretch>
+        </p:blipFill>
+        <p:spPr>
+          <a:xfrm>
+            <a:off x="5547544" y="4261104"/>
+            <a:ext cx="3642592" cy="2268588"/>
+          </a:xfrm>
+          <a:prstGeom prst="rect">
+            <a:avLst/>
+          </a:prstGeom>
+        </p:spPr>
+      </p:pic>
     </p:spTree>
     <p:extLst>
       <p:ext uri="{BB962C8B-B14F-4D97-AF65-F5344CB8AC3E}">
-        <p14:creationId xmlns:p14="http://schemas.microsoft.com/office/powerpoint/2010/main" val="1689982182"/>
+        <p14:creationId xmlns:p14="http://schemas.microsoft.com/office/powerpoint/2010/main" val="4191084248"/>
       </p:ext>
     </p:extLst>
   </p:cSld>
